--- a/out/analysis/dnssec_software_summary.pptx
+++ b/out/analysis/dnssec_software_summary.pptx
@@ -3291,7 +3291,7 @@
                 </a:solidFill>
                 <a:latin typeface="Segoe UI"/>
               </a:rPr>
-              <a:t>Short version: code is never the wait, defaults act only on newly signed zones, one RFC was forced by validators before it was published, and no CVE led a push.</a:t>
+              <a:t>Short version: code is never the wait; defaults do reach zones, through OS releases and only on newly signed zones, so they never show as a spike; one RFC was forced by validators before it was published; no CVE led a push.</a:t>
             </a:r>
           </a:p>
         </p:txBody>
@@ -5321,7 +5321,7 @@
                 </a:solidFill>
                 <a:latin typeface="Segoe UI"/>
               </a:rPr>
-              <a:t>Updates change what new zones get; only BIND's defaults reached reverse DNS</a:t>
+              <a:t>Updates work: the OS release is the event, and it acts on new zones only</a:t>
             </a:r>
           </a:p>
         </p:txBody>
@@ -5400,7 +5400,7 @@
                 </a:solidFill>
                 <a:latin typeface="Segoe UI"/>
               </a:rPr>
-              <a:t>ECDSA: the 2016 Knot and PowerDNS defaults left no trace (0.2% -&gt; 0.3% and 0.3% -&gt; 0.2% in the year either side). The share stepped around BIND 9.16.0 (22.8% -&gt; 38.8%), which Ubuntu 20.04 and Debian 11 carried. Reverse operators run BIND.</a:t>
+              <a:t>ECDSA: on their upstream dates the 2016 Knot and PowerDNS defaults left no trace (0.2% -&gt; 0.3%, 0.3% -&gt; 0.2%), and neither did Ubuntu 16.04, which carried only Knot. Debian 9 (2017-06-17) was the first OS release to ship both ECDSA-default signers: in the year after it, 57.1% of new reverse signings chose ECDSA (0.2% the year before), from 55 blocks (3 before). A second step, 22.8% -&gt; 38.8%, came with BIND 9.16.0 in Ubuntu 20.04 and Debian 11.</a:t>
             </a:r>
           </a:p>
           <a:p>
@@ -6872,7 +6872,7 @@
                 </a:solidFill>
                 <a:latin typeface="Segoe UI"/>
               </a:rPr>
-              <a:t>OS package dates bound when a default became reachable by apt, not when anyone upgraded; Debian 9 and 10 are no longer served and are not asserted.</a:t>
+              <a:t>OS package dates bound when a default became reachable by apt, not when anyone upgraded. The Debian 9 step rests on 55 blocks in one corpus, APNIC-heavy, with one block a third of it.</a:t>
             </a:r>
           </a:p>
           <a:p>

--- a/out/analysis/dnssec_software_summary.pptx
+++ b/out/analysis/dnssec_software_summary.pptx
@@ -3551,7 +3551,7 @@
                 </a:solidFill>
                 <a:latin typeface="Segoe UI"/>
               </a:rPr>
-              <a:t>the first Ubuntu LTS (16.04 to 24.04) and Debian (11 to 13) release carrying each version, from Launchpad and the Debian tracker: the path by which most operators actually receive a new default.</a:t>
+              <a:t>the first Ubuntu LTS (16.04 to 24.04) and Debian (9 to 13) release carrying each version, from Launchpad and sources.debian.org: the path by which most operators actually receive a new default. The new-signings test is run around each OS release as well as around the upstream one.</a:t>
             </a:r>
           </a:p>
         </p:txBody>
@@ -5018,7 +5018,7 @@
                 </a:solidFill>
                 <a:latin typeface="Segoe UI"/>
               </a:rPr>
-              <a:t>Defaults sit closer to take-off than RFCs do, but no event study or release scan finds a release month that moves the curve: after detrending, the smallest circular-shift p across the eight projects is 0.11. 97% of months contain some DNS release, so 'a release came just before' is always true and never evidence.</a:t>
+              <a:t>Defaults sit closer to take-off than RFCs do, but no event study or release scan finds a release month that moves the curve: after detrending, the smallest circular-shift p across the eight projects is 0.11. 97% of months in the release-scan span contain a stable release of one of the eight, so 'a release came just before' is always true and never evidence. Where defaults do show is in what newly signed zones choose, after the OS release that carries them (slide 5).</a:t>
             </a:r>
           </a:p>
           <a:p>
@@ -5774,7 +5774,7 @@
                 </a:solidFill>
                 <a:latin typeface="Segoe UI"/>
               </a:rPr>
-              <a:t>A CVE is attached to an RFC by the mechanism its description names, not by citing the RFC; only CVE-2023-50868 (NSEC3) and CVE-2013-4854 (RFC 5011) name their RFC in the text.</a:t>
+              <a:t>A CVE is attached to an RFC by the mechanism its description names, not by citing the RFC: 6 of the 97 DNSSEC CVEs cite any RFC in their text, and only 2 cite one of the RFCs studied here (CVE-2013-4854 -&gt; RFC 5011; CVE-2023-50868 -&gt; RFC 5155, 9276).</a:t>
             </a:r>
           </a:p>
           <a:p>
@@ -5950,10 +5950,10 @@
                 <a:tableStyleId>{5C22544A-7EE6-4342-B048-85BDC9FD1C3A}</a:tableStyleId>
               </a:tblPr>
               <a:tblGrid>
-                <a:gridCol w="2011680"/>
-                <a:gridCol w="1371600"/>
-                <a:gridCol w="3291840"/>
-                <a:gridCol w="4572000"/>
+                <a:gridCol w="1828800"/>
+                <a:gridCol w="1280160"/>
+                <a:gridCol w="4023360"/>
+                <a:gridCol w="4114800"/>
               </a:tblGrid>
               <a:tr h="274320">
                 <a:tc>
@@ -6181,7 +6181,7 @@
                             <a:srgbClr val="0B0B0B"/>
                           </a:solidFill>
                         </a:rPr>
-                        <a:t>signer default (2016) + operator rollovers</a:t>
+                        <a:t>signer defaults reach new zones via Debian 9 (2017); majority by operator rollovers</a:t>
                       </a:r>
                     </a:p>
                   </a:txBody>

--- a/out/analysis/dnssec_software_summary.pptx
+++ b/out/analysis/dnssec_software_summary.pptx
@@ -14,6 +14,8 @@
     <p:sldId id="262" r:id="rId13"/>
     <p:sldId id="263" r:id="rId14"/>
     <p:sldId id="264" r:id="rId15"/>
+    <p:sldId id="265" r:id="rId16"/>
+    <p:sldId id="266" r:id="rId17"/>
   </p:sldIdLst>
   <p:sldSz cx="12191695" cy="6858000" type="screen4x3"/>
   <p:notesSz cx="6858000" cy="9144000"/>
@@ -3304,6 +3306,484 @@
 </p:sld>
 </file>
 
+<file path=ppt/slides/slide10.xml><?xml version="1.0" encoding="utf-8"?>
+<p:sld xmlns:a="http://schemas.openxmlformats.org/drawingml/2006/main" xmlns:p="http://schemas.openxmlformats.org/presentationml/2006/main" xmlns:r="http://schemas.openxmlformats.org/officeDocument/2006/relationships">
+  <p:cSld>
+    <p:bg>
+      <p:bgPr>
+        <a:solidFill>
+          <a:srgbClr val="FCFCFB"/>
+        </a:solidFill>
+        <a:effectLst/>
+      </p:bgPr>
+    </p:bg>
+    <p:spTree>
+      <p:nvGrpSpPr>
+        <p:cNvPr id="1" name=""/>
+        <p:cNvGrpSpPr/>
+        <p:nvPr/>
+      </p:nvGrpSpPr>
+      <p:grpSpPr/>
+      <p:sp>
+        <p:nvSpPr>
+          <p:cNvPr id="2" name="TextBox 1"/>
+          <p:cNvSpPr txBox="1"/>
+          <p:nvPr/>
+        </p:nvSpPr>
+        <p:spPr>
+          <a:xfrm>
+            <a:off x="566928" y="274320"/>
+            <a:ext cx="10972800" cy="274320"/>
+          </a:xfrm>
+          <a:prstGeom prst="rect">
+            <a:avLst/>
+          </a:prstGeom>
+          <a:noFill/>
+        </p:spPr>
+        <p:txBody>
+          <a:bodyPr wrap="square">
+            <a:spAutoFit/>
+          </a:bodyPr>
+          <a:lstStyle/>
+          <a:p>
+            <a:pPr>
+              <a:spcAft>
+                <a:spcPts val="600"/>
+              </a:spcAft>
+            </a:pPr>
+            <a:r>
+              <a:rPr sz="1200" b="1">
+                <a:solidFill>
+                  <a:srgbClr val="898781"/>
+                </a:solidFill>
+                <a:latin typeface="Segoe UI"/>
+              </a:rPr>
+              <a:t>SUMMARY AND TAKEAWAYS</a:t>
+            </a:r>
+          </a:p>
+        </p:txBody>
+      </p:sp>
+      <p:sp>
+        <p:nvSpPr>
+          <p:cNvPr id="3" name="TextBox 2"/>
+          <p:cNvSpPr txBox="1"/>
+          <p:nvPr/>
+        </p:nvSpPr>
+        <p:spPr>
+          <a:xfrm>
+            <a:off x="566928" y="530352"/>
+            <a:ext cx="11064240" cy="548640"/>
+          </a:xfrm>
+          <a:prstGeom prst="rect">
+            <a:avLst/>
+          </a:prstGeom>
+          <a:noFill/>
+        </p:spPr>
+        <p:txBody>
+          <a:bodyPr wrap="square">
+            <a:spAutoFit/>
+          </a:bodyPr>
+          <a:lstStyle/>
+          <a:p>
+            <a:pPr>
+              <a:spcAft>
+                <a:spcPts val="600"/>
+              </a:spcAft>
+            </a:pPr>
+            <a:r>
+              <a:rPr sz="2400" b="1">
+                <a:solidFill>
+                  <a:srgbClr val="0B0B0B"/>
+                </a:solidFill>
+                <a:latin typeface="Segoe UI"/>
+              </a:rPr>
+              <a:t>What decides whether a DNSSEC RFC gets adopted</a:t>
+            </a:r>
+          </a:p>
+        </p:txBody>
+      </p:sp>
+      <p:sp>
+        <p:nvSpPr>
+          <p:cNvPr id="4" name="TextBox 3"/>
+          <p:cNvSpPr txBox="1"/>
+          <p:nvPr/>
+        </p:nvSpPr>
+        <p:spPr>
+          <a:xfrm>
+            <a:off x="566928" y="1234440"/>
+            <a:ext cx="11064240" cy="5120640"/>
+          </a:xfrm>
+          <a:prstGeom prst="rect">
+            <a:avLst/>
+          </a:prstGeom>
+          <a:noFill/>
+        </p:spPr>
+        <p:txBody>
+          <a:bodyPr wrap="square">
+            <a:spAutoFit/>
+          </a:bodyPr>
+          <a:lstStyle/>
+          <a:p>
+            <a:pPr>
+              <a:spcAft>
+                <a:spcPts val="700"/>
+              </a:spcAft>
+            </a:pPr>
+            <a:r>
+              <a:rPr sz="1150" b="0">
+                <a:solidFill>
+                  <a:srgbClr val="0B0B0B"/>
+                </a:solidFill>
+                <a:latin typeface="Segoe UI"/>
+              </a:rPr>
+              <a:t>1.  Code is never the bottleneck. Every RFC studied was implemented within -0.4 to +1.8 years of publication; the first zone then took 0.1 to 3.8 years. The wait is operators, not vendors.</a:t>
+            </a:r>
+          </a:p>
+          <a:p>
+            <a:pPr>
+              <a:spcAft>
+                <a:spcPts val="700"/>
+              </a:spcAft>
+            </a:pPr>
+            <a:r>
+              <a:rPr sz="1150" b="0">
+                <a:solidFill>
+                  <a:srgbClr val="0B0B0B"/>
+                </a:solidFill>
+                <a:latin typeface="Segoe UI"/>
+              </a:rPr>
+              <a:t>2.  Defaults are what move zones, and they move only newly signed zones. A default change never re-signs an existing zone, so it never shows as a spike; it shows in what new zones choose, months to years later.</a:t>
+            </a:r>
+          </a:p>
+          <a:p>
+            <a:pPr>
+              <a:spcAft>
+                <a:spcPts val="700"/>
+              </a:spcAft>
+            </a:pPr>
+            <a:r>
+              <a:rPr sz="1150" b="0">
+                <a:solidFill>
+                  <a:srgbClr val="0B0B0B"/>
+                </a:solidFill>
+                <a:latin typeface="Segoe UI"/>
+              </a:rPr>
+              <a:t>3.  Operators switch in sudden batches, and the trigger is not identifiable. New reverse signings jumped to ECDSA in 4 steps, each one month and a few parent blocks. An OS release precedes every step but a different one each time, 31% of months follow one anyway, and two RSA/SHA-256 steps have none.</a:t>
+            </a:r>
+          </a:p>
+          <a:p>
+            <a:pPr>
+              <a:spcAft>
+                <a:spcPts val="700"/>
+              </a:spcAft>
+            </a:pPr>
+            <a:r>
+              <a:rPr sz="1150" b="0">
+                <a:solidFill>
+                  <a:srgbClr val="0B0B0B"/>
+                </a:solidFill>
+                <a:latin typeface="Segoe UI"/>
+              </a:rPr>
+              <a:t>4.  Spikes in the adoption curve are operator decisions: six-figure rollovers by a registry or hoster, years after any default. No release month moves the curve; 97% of months contain a release, so a nearby release is never evidence.</a:t>
+            </a:r>
+          </a:p>
+          <a:p>
+            <a:pPr>
+              <a:spcAft>
+                <a:spcPts val="700"/>
+              </a:spcAft>
+            </a:pPr>
+            <a:r>
+              <a:rPr sz="1150" b="0">
+                <a:solidFill>
+                  <a:srgbClr val="0B0B0B"/>
+                </a:solidFill>
+                <a:latin typeface="Segoe UI"/>
+              </a:rPr>
+              <a:t>5.  Validators can force an RFC before it exists. The NSEC3 iteration collapse of 2021-10 followed the resolver caps and CVE-2021-40083 by two months and preceded RFC 9276 by ten. It is the only vendor-timed adoption event in the data.</a:t>
+            </a:r>
+          </a:p>
+          <a:p>
+            <a:pPr>
+              <a:spcAft>
+                <a:spcPts val="700"/>
+              </a:spcAft>
+            </a:pPr>
+            <a:r>
+              <a:rPr sz="1150" b="0">
+                <a:solidFill>
+                  <a:srgbClr val="0B0B0B"/>
+                </a:solidFill>
+                <a:latin typeface="Segoe UI"/>
+              </a:rPr>
+              <a:t>6.  CVEs do not lead adoption. CVE-patch months and RFC-publication months have the same adoption rate as any other month; the one CVE inside a causal chain is a symptom of the problem the caps fixed.</a:t>
+            </a:r>
+          </a:p>
+          <a:p>
+            <a:pPr>
+              <a:spcAft>
+                <a:spcPts val="700"/>
+              </a:spcAft>
+            </a:pPr>
+            <a:r>
+              <a:rPr sz="1150" b="0">
+                <a:solidFill>
+                  <a:srgbClr val="0B0B0B"/>
+                </a:solidFill>
+                <a:latin typeface="Segoe UI"/>
+              </a:rPr>
+              <a:t>7.  Never-adopted RFCs (EdDSA, GOST) share one trait: no signer ever made them a default. Niche ones (CDS) only matter where the parent acts on them.</a:t>
+            </a:r>
+          </a:p>
+          <a:p>
+            <a:pPr>
+              <a:spcAft>
+                <a:spcPts val="700"/>
+              </a:spcAft>
+            </a:pPr>
+            <a:r>
+              <a:rPr sz="1150" b="0">
+                <a:solidFill>
+                  <a:srgbClr val="0B0B0B"/>
+                </a:solidFill>
+                <a:latin typeface="Segoe UI"/>
+              </a:rPr>
+              <a:t>Takeaway: to predict an RFC's adoption, look at whether a signer makes it the default, not at the RFC date, the first implementation, or the CVEs. Which delivery path carries a default to a given operator is not visible in published DNS records.</a:t>
+            </a:r>
+          </a:p>
+        </p:txBody>
+      </p:sp>
+    </p:spTree>
+  </p:cSld>
+  <p:clrMapOvr>
+    <a:masterClrMapping/>
+  </p:clrMapOvr>
+</p:sld>
+</file>
+
+<file path=ppt/slides/slide11.xml><?xml version="1.0" encoding="utf-8"?>
+<p:sld xmlns:a="http://schemas.openxmlformats.org/drawingml/2006/main" xmlns:p="http://schemas.openxmlformats.org/presentationml/2006/main" xmlns:r="http://schemas.openxmlformats.org/officeDocument/2006/relationships">
+  <p:cSld>
+    <p:bg>
+      <p:bgPr>
+        <a:solidFill>
+          <a:srgbClr val="FCFCFB"/>
+        </a:solidFill>
+        <a:effectLst/>
+      </p:bgPr>
+    </p:bg>
+    <p:spTree>
+      <p:nvGrpSpPr>
+        <p:cNvPr id="1" name=""/>
+        <p:cNvGrpSpPr/>
+        <p:nvPr/>
+      </p:nvGrpSpPr>
+      <p:grpSpPr/>
+      <p:sp>
+        <p:nvSpPr>
+          <p:cNvPr id="2" name="TextBox 1"/>
+          <p:cNvSpPr txBox="1"/>
+          <p:nvPr/>
+        </p:nvSpPr>
+        <p:spPr>
+          <a:xfrm>
+            <a:off x="566928" y="274320"/>
+            <a:ext cx="10972800" cy="274320"/>
+          </a:xfrm>
+          <a:prstGeom prst="rect">
+            <a:avLst/>
+          </a:prstGeom>
+          <a:noFill/>
+        </p:spPr>
+        <p:txBody>
+          <a:bodyPr wrap="square">
+            <a:spAutoFit/>
+          </a:bodyPr>
+          <a:lstStyle/>
+          <a:p>
+            <a:pPr>
+              <a:spcAft>
+                <a:spcPts val="600"/>
+              </a:spcAft>
+            </a:pPr>
+            <a:r>
+              <a:rPr sz="1200" b="1">
+                <a:solidFill>
+                  <a:srgbClr val="898781"/>
+                </a:solidFill>
+                <a:latin typeface="Segoe UI"/>
+              </a:rPr>
+              <a:t>LIMITS</a:t>
+            </a:r>
+          </a:p>
+        </p:txBody>
+      </p:sp>
+      <p:sp>
+        <p:nvSpPr>
+          <p:cNvPr id="3" name="TextBox 2"/>
+          <p:cNvSpPr txBox="1"/>
+          <p:nvPr/>
+        </p:nvSpPr>
+        <p:spPr>
+          <a:xfrm>
+            <a:off x="566928" y="530352"/>
+            <a:ext cx="11064240" cy="548640"/>
+          </a:xfrm>
+          <a:prstGeom prst="rect">
+            <a:avLst/>
+          </a:prstGeom>
+          <a:noFill/>
+        </p:spPr>
+        <p:txBody>
+          <a:bodyPr wrap="square">
+            <a:spAutoFit/>
+          </a:bodyPr>
+          <a:lstStyle/>
+          <a:p>
+            <a:pPr>
+              <a:spcAft>
+                <a:spcPts val="600"/>
+              </a:spcAft>
+            </a:pPr>
+            <a:r>
+              <a:rPr sz="2400" b="1">
+                <a:solidFill>
+                  <a:srgbClr val="0B0B0B"/>
+                </a:solidFill>
+                <a:latin typeface="Segoe UI"/>
+              </a:rPr>
+              <a:t>What this cannot show</a:t>
+            </a:r>
+          </a:p>
+        </p:txBody>
+      </p:sp>
+      <p:sp>
+        <p:nvSpPr>
+          <p:cNvPr id="4" name="TextBox 3"/>
+          <p:cNvSpPr txBox="1"/>
+          <p:nvPr/>
+        </p:nvSpPr>
+        <p:spPr>
+          <a:xfrm>
+            <a:off x="566928" y="1280160"/>
+            <a:ext cx="11064240" cy="5029200"/>
+          </a:xfrm>
+          <a:prstGeom prst="rect">
+            <a:avLst/>
+          </a:prstGeom>
+          <a:noFill/>
+        </p:spPr>
+        <p:txBody>
+          <a:bodyPr wrap="square">
+            <a:spAutoFit/>
+          </a:bodyPr>
+          <a:lstStyle/>
+          <a:p>
+            <a:pPr>
+              <a:spcAft>
+                <a:spcPts val="800"/>
+              </a:spcAft>
+            </a:pPr>
+            <a:r>
+              <a:rPr sz="1200" b="0">
+                <a:solidFill>
+                  <a:srgbClr val="0B0B0B"/>
+                </a:solidFill>
+                <a:latin typeface="Segoe UI"/>
+              </a:rPr>
+              <a:t>Which software signs a zone is never visible from its records; 'nearest release' is timing evidence. Registry and registrar signing platforms are closed source and are not in the release list.</a:t>
+            </a:r>
+          </a:p>
+          <a:p>
+            <a:pPr>
+              <a:spcAft>
+                <a:spcPts val="800"/>
+              </a:spcAft>
+            </a:pPr>
+            <a:r>
+              <a:rPr sz="1200" b="0">
+                <a:solidFill>
+                  <a:srgbClr val="0B0B0B"/>
+                </a:solidFill>
+                <a:latin typeface="Segoe UI"/>
+              </a:rPr>
+              <a:t>OpenINTEL here is monthly aggregates for seven TLDs from 2016-06 (2020-05 for .ch/.li) to 2023-12, so RSA/SHA-256 and NSEC3 adoption are visible only in reverse DNS, and forward spikes cannot be attributed to an operator.</a:t>
+            </a:r>
+          </a:p>
+          <a:p>
+            <a:pPr>
+              <a:spcAft>
+                <a:spcPts val="800"/>
+              </a:spcAft>
+            </a:pPr>
+            <a:r>
+              <a:rPr sz="1200" b="0">
+                <a:solidFill>
+                  <a:srgbClr val="0B0B0B"/>
+                </a:solidFill>
+                <a:latin typeface="Segoe UI"/>
+              </a:rPr>
+              <a:t>Reverse DNS is small (25,930 change events on 13,654 delegations) and NSEC3 is visible there only through algorithm 7.</a:t>
+            </a:r>
+          </a:p>
+          <a:p>
+            <a:pPr>
+              <a:spcAft>
+                <a:spcPts val="800"/>
+              </a:spcAft>
+            </a:pPr>
+            <a:r>
+              <a:rPr sz="1200" b="0">
+                <a:solidFill>
+                  <a:srgbClr val="0B0B0B"/>
+                </a:solidFill>
+                <a:latin typeface="Segoe UI"/>
+              </a:rPr>
+              <a:t>The OS package table is Debian, Ubuntu and RHEL only. FreeBSD ports, Alpine, containers, appliances and source builds are absent, and RHEL base ships no Knot or PowerDNS at all. Package dates bound when a default became reachable, never what an operator ran.</a:t>
+            </a:r>
+          </a:p>
+          <a:p>
+            <a:pPr>
+              <a:spcAft>
+                <a:spcPts val="800"/>
+              </a:spcAft>
+            </a:pPr>
+            <a:r>
+              <a:rPr sz="1200" b="0">
+                <a:solidFill>
+                  <a:srgbClr val="0B0B0B"/>
+                </a:solidFill>
+                <a:latin typeface="Segoe UI"/>
+              </a:rPr>
+              <a:t>With 3 to 31 spikes per RFC, 'beats chance' is a reading, not a test with a p-value. CVE attribution is by NVD product only.</a:t>
+            </a:r>
+          </a:p>
+          <a:p>
+            <a:pPr>
+              <a:spcAft>
+                <a:spcPts val="800"/>
+              </a:spcAft>
+            </a:pPr>
+            <a:r>
+              <a:rPr sz="1200" b="0">
+                <a:solidFill>
+                  <a:srgbClr val="0B0B0B"/>
+                </a:solidFill>
+                <a:latin typeface="Segoe UI"/>
+              </a:rPr>
+              <a:t>Decks with every figure and ledger: dnssec_rfc_why.pptx (per-RFC timelines), dnssec_program_rfc_cases.pptx (per-program case studies), dnssec_algorithm_flows.pptx (what zones move between). CSVs: dns_software_*.csv, dns_cve_list.csv, dns_program_rfc_spikes.csv.</a:t>
+            </a:r>
+          </a:p>
+        </p:txBody>
+      </p:sp>
+    </p:spTree>
+  </p:cSld>
+  <p:clrMapOvr>
+    <a:masterClrMapping/>
+  </p:clrMapOvr>
+</p:sld>
+</file>
+
 <file path=ppt/slides/slide2.xml><?xml version="1.0" encoding="utf-8"?>
 <p:sld xmlns:a="http://schemas.openxmlformats.org/drawingml/2006/main" xmlns:p="http://schemas.openxmlformats.org/presentationml/2006/main" xmlns:r="http://schemas.openxmlformats.org/officeDocument/2006/relationships">
   <p:cSld>
@@ -5321,14 +5801,14 @@
                 </a:solidFill>
                 <a:latin typeface="Segoe UI"/>
               </a:rPr>
-              <a:t>Updates work: the OS release is the event, and it acts on new zones only</a:t>
+              <a:t>Updates change what a new zone gets, never an existing one</a:t>
             </a:r>
           </a:p>
         </p:txBody>
       </p:sp>
       <p:pic>
         <p:nvPicPr>
-          <p:cNvPr id="4" name="Picture 3" descr="rfc_6605_new_signings.png"/>
+          <p:cNvPr id="4" name="Picture 3" descr="os_release_attribution.png"/>
           <p:cNvPicPr>
             <a:picLocks noChangeAspect="1"/>
           </p:cNvPicPr>
@@ -5342,8 +5822,8 @@
         </p:blipFill>
         <p:spPr>
           <a:xfrm>
-            <a:off x="2219586" y="1143000"/>
-            <a:ext cx="7752522" cy="2377440"/>
+            <a:off x="4075187" y="1097280"/>
+            <a:ext cx="4041321" cy="2514600"/>
           </a:xfrm>
           <a:prstGeom prst="rect">
             <a:avLst/>
@@ -5400,7 +5880,23 @@
                 </a:solidFill>
                 <a:latin typeface="Segoe UI"/>
               </a:rPr>
-              <a:t>ECDSA: on their upstream dates the 2016 Knot and PowerDNS defaults left no trace (0.2% -&gt; 0.3%, 0.3% -&gt; 0.2%), and neither did Ubuntu 16.04, which carried only Knot. Debian 9 (2017-06-17) was the first OS release to ship both ECDSA-default signers: in the year after it, 57.1% of new reverse signings chose ECDSA (0.2% the year before), from 55 blocks (3 before). A second step, 22.8% -&gt; 38.8%, came with BIND 9.16.0 in Ubuntu 20.04 and Debian 11.</a:t>
+              <a:t>ECDSA: on their upstream dates the 2016 Knot and PowerDNS defaults left no trace (0.2% -&gt; 0.3%, 0.3% -&gt; 0.2%). Instead new signings stepped 4 times between 2017 and 2020. The first, 2017Q3, is 157 signings with 155 of them in one month, all but 2 in APNIC and one parent block 40% of it. Operators moved in batches, not as a population.</a:t>
+            </a:r>
+          </a:p>
+          <a:p>
+            <a:pPr>
+              <a:spcAft>
+                <a:spcPts val="600"/>
+              </a:spcAft>
+            </a:pPr>
+            <a:r>
+              <a:rPr sz="1100" b="0">
+                <a:solidFill>
+                  <a:srgbClr val="0B0B0B"/>
+                </a:solidFill>
+                <a:latin typeface="Segoe UI"/>
+              </a:rPr>
+              <a:t>An OS release precedes each of those steps, but a different one each time (Debian 9, Ubuntu 18.04, RHEL 8 / Debian 10, Ubuntu 20.04), 31% of all months follow some OS release within 3 months anyway, and two of the five RSA/SHA-256 steps have none at all. The timing cannot name a delivery path, and RHEL -- which ships no Knot or PowerDNS in base -- had no ECDSA-default signer until 2022.</a:t>
             </a:r>
           </a:p>
           <a:p>
@@ -6181,7 +6677,7 @@
                             <a:srgbClr val="0B0B0B"/>
                           </a:solidFill>
                         </a:rPr>
-                        <a:t>signer defaults reach new zones via Debian 9 (2017); majority by operator rollovers</a:t>
+                        <a:t>signer default from 2016, acting on new zones only; majority by operator rollovers</a:t>
                       </a:r>
                     </a:p>
                   </a:txBody>
@@ -6746,7 +7242,7 @@
                 </a:solidFill>
                 <a:latin typeface="Segoe UI"/>
               </a:rPr>
-              <a:t>LIMITS</a:t>
+              <a:t>FINDING 6  ·  CVE PATCHES vs RFC PUBLICATIONS</a:t>
             </a:r>
           </a:p>
         </p:txBody>
@@ -6785,21 +7281,45 @@
                 </a:solidFill>
                 <a:latin typeface="Segoe UI"/>
               </a:rPr>
-              <a:t>What this cannot show</a:t>
-            </a:r>
-          </a:p>
-        </p:txBody>
-      </p:sp>
-      <p:sp>
-        <p:nvSpPr>
-          <p:cNvPr id="4" name="TextBox 3"/>
+              <a:t>Adoption moves at the same speed after either</a:t>
+            </a:r>
+          </a:p>
+        </p:txBody>
+      </p:sp>
+      <p:pic>
+        <p:nvPicPr>
+          <p:cNvPr id="4" name="Picture 3" descr="rate_hist_both.png"/>
+          <p:cNvPicPr>
+            <a:picLocks noChangeAspect="1"/>
+          </p:cNvPicPr>
+          <p:nvPr/>
+        </p:nvPicPr>
+        <p:blipFill>
+          <a:blip r:embed="rId2"/>
+          <a:stretch>
+            <a:fillRect/>
+          </a:stretch>
+        </p:blipFill>
+        <p:spPr>
+          <a:xfrm>
+            <a:off x="3133191" y="1143000"/>
+            <a:ext cx="5925312" cy="3291840"/>
+          </a:xfrm>
+          <a:prstGeom prst="rect">
+            <a:avLst/>
+          </a:prstGeom>
+        </p:spPr>
+      </p:pic>
+      <p:sp>
+        <p:nvSpPr>
+          <p:cNvPr id="5" name="TextBox 4"/>
           <p:cNvSpPr txBox="1"/>
           <p:nvPr/>
         </p:nvSpPr>
         <p:spPr>
           <a:xfrm>
-            <a:off x="566928" y="1280160"/>
-            <a:ext cx="11064240" cy="5029200"/>
+            <a:off x="566928" y="4846320"/>
+            <a:ext cx="11064240" cy="1737360"/>
           </a:xfrm>
           <a:prstGeom prst="rect">
             <a:avLst/>
@@ -6814,97 +7334,33 @@
           <a:p>
             <a:pPr>
               <a:spcAft>
-                <a:spcPts val="800"/>
+                <a:spcPts val="600"/>
               </a:spcAft>
             </a:pPr>
             <a:r>
-              <a:rPr sz="1200" b="0">
+              <a:rPr sz="1100" b="0">
                 <a:solidFill>
                   <a:srgbClr val="0B0B0B"/>
                 </a:solidFill>
                 <a:latin typeface="Segoe UI"/>
               </a:rPr>
-              <a:t>Which software signs a zone is never visible from its records; 'nearest release' is timing evidence. Registry and registrar signing platforms are closed source and are not in the release list.</a:t>
+              <a:t>Take every month in which a DNSSEC CVE was patched (21 months; 39 CVEs, several sharing a fix month) and every month in which a DNSSEC RFC was published (16 months inside the reverse series). The adoption rate over that month and the three after it has the same distribution in both groups and in ordinary months: medians 4.0, 4.2 and 3.9 thousandths of a point per month; permutation p = 0.93.</a:t>
             </a:r>
           </a:p>
           <a:p>
             <a:pPr>
               <a:spcAft>
-                <a:spcPts val="800"/>
+                <a:spcPts val="600"/>
               </a:spcAft>
             </a:pPr>
             <a:r>
-              <a:rPr sz="1200" b="0">
+              <a:rPr sz="1100" b="0">
                 <a:solidFill>
                   <a:srgbClr val="0B0B0B"/>
                 </a:solidFill>
                 <a:latin typeface="Segoe UI"/>
               </a:rPr>
-              <a:t>OpenINTEL here is monthly aggregates for seven TLDs from 2016-06 (2020-05 for .ch/.li) to 2023-12, so RSA/SHA-256 and NSEC3 adoption are visible only in reverse DNS, and forward spikes cannot be attributed to an operator.</a:t>
-            </a:r>
-          </a:p>
-          <a:p>
-            <a:pPr>
-              <a:spcAft>
-                <a:spcPts val="800"/>
-              </a:spcAft>
-            </a:pPr>
-            <a:r>
-              <a:rPr sz="1200" b="0">
-                <a:solidFill>
-                  <a:srgbClr val="0B0B0B"/>
-                </a:solidFill>
-                <a:latin typeface="Segoe UI"/>
-              </a:rPr>
-              <a:t>Reverse DNS is small (25,930 change events on 13,654 delegations) and NSEC3 is visible there only through algorithm 7.</a:t>
-            </a:r>
-          </a:p>
-          <a:p>
-            <a:pPr>
-              <a:spcAft>
-                <a:spcPts val="800"/>
-              </a:spcAft>
-            </a:pPr>
-            <a:r>
-              <a:rPr sz="1200" b="0">
-                <a:solidFill>
-                  <a:srgbClr val="0B0B0B"/>
-                </a:solidFill>
-                <a:latin typeface="Segoe UI"/>
-              </a:rPr>
-              <a:t>OS package dates bound when a default became reachable by apt, not when anyone upgraded. The Debian 9 step rests on 55 blocks in one corpus, APNIC-heavy, with one block a third of it.</a:t>
-            </a:r>
-          </a:p>
-          <a:p>
-            <a:pPr>
-              <a:spcAft>
-                <a:spcPts val="800"/>
-              </a:spcAft>
-            </a:pPr>
-            <a:r>
-              <a:rPr sz="1200" b="0">
-                <a:solidFill>
-                  <a:srgbClr val="0B0B0B"/>
-                </a:solidFill>
-                <a:latin typeface="Segoe UI"/>
-              </a:rPr>
-              <a:t>With 3 to 31 spikes per RFC, 'beats chance' is a reading, not a test with a p-value. CVE attribution is by NVD product only.</a:t>
-            </a:r>
-          </a:p>
-          <a:p>
-            <a:pPr>
-              <a:spcAft>
-                <a:spcPts val="800"/>
-              </a:spcAft>
-            </a:pPr>
-            <a:r>
-              <a:rPr sz="1200" b="0">
-                <a:solidFill>
-                  <a:srgbClr val="0B0B0B"/>
-                </a:solidFill>
-                <a:latin typeface="Segoe UI"/>
-              </a:rPr>
-              <a:t>Decks with every figure and ledger: dnssec_rfc_why.pptx (per-RFC timelines), dnssec_program_rfc_cases.pptx (per-program case studies), dnssec_algorithm_flows.pptx (what zones move between). CSVs: dns_software_*.csv, dns_cve_list.csv, dns_program_rfc_spikes.csv.</a:t>
+              <a:t>Measured on each event's own mechanism instead, RFC publications sit in ordinary or dead months (RFC 6605 at the 3rd percentile of the ECDSA curve) and two CVE patch months are extreme: CVE-2021-40083 is the NSEC3 iteration collapse, and CVE-2022-38177/38178 coincides with one ARIN block re-signing to ECDSA -- timing, not cause.</a:t>
             </a:r>
           </a:p>
         </p:txBody>

--- a/out/analysis/dnssec_software_summary.pptx
+++ b/out/analysis/dnssec_software_summary.pptx
@@ -3293,7 +3293,7 @@
                 </a:solidFill>
                 <a:latin typeface="Segoe UI"/>
               </a:rPr>
-              <a:t>Short version: code is never the wait; defaults do reach zones, through OS releases and only on newly signed zones, so they never show as a spike; one RFC was forced by validators before it was published; no CVE led a push.</a:t>
+              <a:t>Short version: code is never the wait; a default only ever changes what a newly signed zone gets, so it never shows as a spike; operators switch in sudden batches and the trigger cannot be identified; one RFC was forced by validators before it was published; no CVE led a push.</a:t>
             </a:r>
           </a:p>
         </p:txBody>
@@ -3452,7 +3452,7 @@
                 </a:solidFill>
                 <a:latin typeface="Segoe UI"/>
               </a:rPr>
-              <a:t>2.  Defaults are what move zones, and they move only newly signed zones. A default change never re-signs an existing zone, so it never shows as a spike; it shows in what new zones choose, months to years later.</a:t>
+              <a:t>2.  A default can only ever change what a newly signed zone gets. It never re-signs an existing zone, so it cannot produce a spike; the only place it could show is in what new zones choose, months to years later.</a:t>
             </a:r>
           </a:p>
           <a:p>
@@ -4031,7 +4031,7 @@
                 </a:solidFill>
                 <a:latin typeface="Segoe UI"/>
               </a:rPr>
-              <a:t>the first Ubuntu LTS (16.04 to 24.04) and Debian (9 to 13) release carrying each version, from Launchpad and sources.debian.org: the path by which most operators actually receive a new default. The new-signings test is run around each OS release as well as around the upstream one.</a:t>
+              <a:t>Debian 9-13 and Ubuntu LTS 16.04-24.04 by version (Launchpad, sources.debian.org) and RHEL majors by date. One delivery path among several, and a partial one: RHEL base carries only BIND, Knot and PowerDNS come from EPEL, and FreeBSD, Alpine, containers and source builds are not represented at all.</a:t>
             </a:r>
           </a:p>
         </p:txBody>
@@ -5498,7 +5498,7 @@
                 </a:solidFill>
                 <a:latin typeface="Segoe UI"/>
               </a:rPr>
-              <a:t>Defaults sit closer to take-off than RFCs do, but no event study or release scan finds a release month that moves the curve: after detrending, the smallest circular-shift p across the eight projects is 0.11. 97% of months in the release-scan span contain a stable release of one of the eight, so 'a release came just before' is always true and never evidence. Where defaults do show is in what newly signed zones choose, after the OS release that carries them (slide 5).</a:t>
+              <a:t>Defaults sit closer to take-off than RFCs do, but no event study or release scan finds a release month that moves the curve: after detrending, the smallest circular-shift p across the eight projects is 0.11. 97% of months in the release-scan span contain a stable release of one of the eight, so 'a release came just before' is always true and never evidence. Where a default could show at all is in what newly signed zones choose, and there the picture is sudden batches, not diffusion (slide 5).</a:t>
             </a:r>
           </a:p>
           <a:p>
@@ -5912,7 +5912,7 @@
                 </a:solidFill>
                 <a:latin typeface="Segoe UI"/>
               </a:rPr>
-              <a:t>RSA/SHA-256: new signings choosing it went 0.9% -&gt; 20.0% across OpenDNSSEC 1.2.0's default (2011-03) and kept rising for two years; BIND 9.7.0 had shipped it 13 months earlier, so it reads as availability, not one vendor.</a:t>
+              <a:t>RSA/SHA-256 is the same story earlier: new signings go from 0% in 2010Q4 to 20% in 2011Q2 and 81% in 2012Q2, and the step detector puts the step at 2012Q2 -- 15 months after OpenDNSSEC 1.2.0 made RSASHA256 its default and 27 after BIND 9.7.0 shipped it. The 2011 rise is 88 signings across three RIRs with one parent block a third of them.</a:t>
             </a:r>
           </a:p>
           <a:p>
@@ -6591,7 +6591,7 @@
                             <a:srgbClr val="0B0B0B"/>
                           </a:solidFill>
                         </a:rPr>
-                        <a:t>signer default, inherited by new zones</a:t>
+                        <a:t>signer default from 2011, acting on new zones only</a:t>
                       </a:r>
                     </a:p>
                   </a:txBody>
@@ -6612,7 +6612,7 @@
                             <a:srgbClr val="0B0B0B"/>
                           </a:solidFill>
                         </a:rPr>
-                        <a:t>first zone 2010-03; new reverse signings 0.9% -&gt; 20.0% across the 2011 default</a:t>
+                        <a:t>first zone 2010-03; new signings 0% (2010Q4) -&gt; 20% (2011Q2) -&gt; 81% (2012Q2)</a:t>
                       </a:r>
                     </a:p>
                   </a:txBody>

--- a/out/analysis/dnssec_software_summary.pptx
+++ b/out/analysis/dnssec_software_summary.pptx
@@ -3293,7 +3293,7 @@
                 </a:solidFill>
                 <a:latin typeface="Segoe UI"/>
               </a:rPr>
-              <a:t>Short version: code is never the wait; a default only ever changes what a newly signed zone gets, so it never shows as a spike; operators switch in sudden batches and the trigger cannot be identified; one RFC was forced by validators before it was published; no CVE led a push.</a:t>
+              <a:t>Short version: code is never the wait; a default only ever changes what a newly signed zone gets, so it never shows as a spike; operators switch in sudden batches and the trigger cannot be identified; one RFC was forced by validators before it was published; and no CVE led a push, including that one, where the CVE and the vendor caps are the same event rather than a cause.</a:t>
             </a:r>
           </a:p>
         </p:txBody>
@@ -3436,7 +3436,7 @@
                 </a:solidFill>
                 <a:latin typeface="Segoe UI"/>
               </a:rPr>
-              <a:t>1.  Code is never the bottleneck. Every RFC studied was implemented within -0.4 to +1.8 years of publication; the first zone then took 0.1 to 3.8 years. The wait is operators, not vendors.</a:t>
+              <a:t>1.  Code is never the bottleneck. For the five RFCs whose onset is measurable, implementation came within -0.4 to +1.8 years of publication and the first zone took a further 0.1 to 3.8 years. The slowest code lag anywhere is RFC 5011 at +2.4 years, still well inside its adoption gap. The wait is operators, not vendors.</a:t>
             </a:r>
           </a:p>
           <a:p>
@@ -3468,7 +3468,7 @@
                 </a:solidFill>
                 <a:latin typeface="Segoe UI"/>
               </a:rPr>
-              <a:t>3.  Operators switch in sudden batches, and the trigger is not identifiable. New reverse signings jumped to ECDSA in 4 steps, each one month and a few parent blocks. An OS release precedes every step but a different one each time, 31% of months follow one anyway, and two RSA/SHA-256 steps have none.</a:t>
+              <a:t>3.  Operators switch in sudden batches, and the trigger is not identifiable. New reverse signings jumped to ECDSA in 4 steps, each over one to three months and 13 to 24 parent blocks. An OS release precedes every step, but no single one explains them: Debian 9, Ubuntu 18.04, RHEL 8 with Debian 10, then Debian 10 with Ubuntu 20.04. 31% of months follow some OS release anyway, and two RSA/SHA-256 steps have none at all.</a:t>
             </a:r>
           </a:p>
           <a:p>
@@ -3484,7 +3484,7 @@
                 </a:solidFill>
                 <a:latin typeface="Segoe UI"/>
               </a:rPr>
-              <a:t>4.  Spikes in the adoption curve are operator decisions: six-figure rollovers by a registry or hoster, years after any default. No release month moves the curve; 97% of months contain a release, so a nearby release is never evidence.</a:t>
+              <a:t>4.  Spikes in the adoption curve are operator decisions: six-figure rollovers by a registry or hoster, years after any default. No release month moves the curve; 95% of months contain a release, so a nearby release is never evidence.</a:t>
             </a:r>
           </a:p>
           <a:p>
@@ -3707,7 +3707,7 @@
                 </a:solidFill>
                 <a:latin typeface="Segoe UI"/>
               </a:rPr>
-              <a:t>OpenINTEL here is monthly aggregates for seven TLDs from 2016-06 (2020-05 for .ch/.li) to 2023-12, so RSA/SHA-256 and NSEC3 adoption are visible only in reverse DNS, and forward spikes cannot be attributed to an operator.</a:t>
+              <a:t>OpenINTEL here is monthly aggregates for seven TLDs entering between 2016-06 and 2020-05 and ending 2023-12. RSA/SHA-256 and NSEC3 are plainly present in it, but their growth happened before it opens, so only reverse DNS witnesses their adoption. Forward spikes cannot be attributed to an operator.</a:t>
             </a:r>
           </a:p>
           <a:p>
@@ -3953,7 +3953,7 @@
                 </a:solidFill>
                 <a:latin typeface="Segoe UI"/>
               </a:rPr>
-              <a:t>8 projects cloned; 1,083 stable release dates from git tags (BIND development branches excluded). For each RFC: the first release that signs or validates it, the release that changed the default, and validator caps -- each backed by the commit and checked to be contained in the cited release.</a:t>
+              <a:t>8 projects cloned; 1,083 stable release dates from git tags (BIND development branches excluded). For each RFC: the first release that signs or validates it, the release that changed the default, and validator caps. All but two rows carry the commit, checked to be contained in the cited release; 10 of 38 are dated from a changelog or documentation instead and are marked approximate.</a:t>
             </a:r>
           </a:p>
         </p:txBody>
@@ -4109,7 +4109,7 @@
                 </a:solidFill>
                 <a:latin typeface="Segoe UI"/>
               </a:rPr>
-              <a:t>441 CVEs across the eight products from NVD; 97 are DNSSEC mechanisms, classified by the mechanism the description names (NSEC3, validation, trust anchor, algorithm...) and attributed to a product only by NVD CPE.</a:t>
+              <a:t>441 CVEs across the eight products from NVD; 97 are DNSSEC mechanisms, classified by the mechanism the description names (NSEC3, validation, trust anchor, algorithm...). Five products are matched by NVD CPE; knot, kresd, opendnssec have no usable CPE and are keyword-matched, so a CVE is never attributed to them.</a:t>
             </a:r>
           </a:p>
         </p:txBody>
@@ -4187,7 +4187,7 @@
                 </a:solidFill>
                 <a:latin typeface="Segoe UI"/>
               </a:rPr>
-              <a:t>OpenINTEL zone files for .se .nu .ch .li .ee .gov .fed.us (2016-06 to 2023-12) and reverse DNS for five RIRs (2009-03 to 2026-08), with the strict AFRINIC+ARIN panel for reverse shares and a per-delegation change ledger.</a:t>
+              <a:t>OpenINTEL zone files for seven TLDs, entering at different dates: .se and .nu 2016-06, .gov and .fed.us 2017-05, .ee 2019-07, .ch and .li 2020-05, all to 2023-12. Reverse DNS for five RIRs, 2009-03 to 2026-08 with ten missing months, with the strict AFRINIC+ARIN panel for reverse shares and a per-delegation change ledger.</a:t>
             </a:r>
           </a:p>
         </p:txBody>
@@ -5498,7 +5498,7 @@
                 </a:solidFill>
                 <a:latin typeface="Segoe UI"/>
               </a:rPr>
-              <a:t>Defaults sit closer to take-off than RFCs do, but no event study or release scan finds a release month that moves the curve: after detrending, the smallest circular-shift p across the eight projects is 0.11. 97% of months in the release-scan span contain a stable release of one of the eight, so 'a release came just before' is always true and never evidence. Where a default could show at all is in what newly signed zones choose, and there the picture is sudden batches, not diffusion (slide 5).</a:t>
+              <a:t>Defaults sit closer to take-off than RFCs do, but no event study or release scan finds a release month that moves the curve: after detrending, the smallest circular-shift p across the eight projects is 0.11. 95% of the 210 months from 2009-03 to 2026-08 contain a stable release of one of the eight, so 'a release came just before' is always true and never evidence. Where a default could show at all is in what newly signed zones choose, and there the picture is sudden batches, not diffusion (slide 5).</a:t>
             </a:r>
           </a:p>
           <a:p>
@@ -5618,7 +5618,7 @@
                 </a:solidFill>
                 <a:latin typeface="Segoe UI"/>
               </a:rPr>
-              <a:t>Defaults changed in 2016; the zones moved in 2019 and 2021, by hand</a:t>
+              <a:t>Defaults changed in 2016; the zones moved years later, when operators chose</a:t>
             </a:r>
           </a:p>
         </p:txBody>
@@ -5697,7 +5697,7 @@
                 </a:solidFill>
                 <a:latin typeface="Segoe UI"/>
               </a:rPr>
-              <a:t>The moves that made ECDSA the majority were all rollovers, 30-35 months after any default (.se 2019-06..2019-07 +217,437). The .ch wave of 2021-06..2021-11 (+591,333) was new signings choosing ECDSA 96% of the time -- that is where a default acts: silently, on new zones, years after it changed. 2 of 31 spikes sit within 3 months of a default, against a 9% chance rate.</a:t>
+              <a:t>In .se the moves that took ECDSA to the majority were entirely rollovers, 30-35 months after any default (2019-06..2019-07 +217,437); .nu crossed 50% on new signings instead (2022-01), and .ch and .li were already past it when the corpus first sees them. The .ch wave of 2021-06..2021-11 (+591,333) was new signings choosing ECDSA 99% of the time -- that is where a default acts: silently, on new zones, years after it changed. 2 of 31 spikes sit within 3 months of a default, against a 9% chance rate.</a:t>
             </a:r>
           </a:p>
         </p:txBody>
@@ -6095,7 +6095,7 @@
                 </a:solidFill>
                 <a:latin typeface="Segoe UI"/>
               </a:rPr>
-              <a:t>Names with 100 or more NSEC3 iterations collapsed in 2021-10..2021-11 in every TLD that had them (.nu 12,145 -&gt; 110), 10 months before RFC 9276. Two to three months earlier PowerDNS 4.5.0 and Unbound 1.13.2 had capped iterations, and CVE-2021-40083 (Knot Resolver, assertion failure on NSEC3 with too many iterations) was published.</a:t>
+              <a:t>Names with 100 or more NSEC3 iterations collapsed in 2021-10..2021-11 in five of the six TLDs that had any (.nu 12,145 -&gt; 110); only .gov, with 38 names, did not move. That is 10 months before RFC 9276. Two to three months earlier PowerDNS 4.5.0 and Unbound 1.13.2 had capped iterations, and CVE-2021-40083 (Knot Resolver, assertion failure on NSEC3 with too many iterations) was published.</a:t>
             </a:r>
           </a:p>
           <a:p>
@@ -6111,7 +6111,7 @@
                 </a:solidFill>
                 <a:latin typeface="Segoe UI"/>
               </a:rPr>
-              <a:t>All 3 spikes are within 3 months of a cap against a 14% chance rate. The caps and the CVE are one event: resolver vendors agreed to reject high counts and the zones that would have failed were re-signed. The RFC codified what validators had already forced. BIND's own default change (100 -&gt; 10) was 140 months earlier and moved nothing.</a:t>
+              <a:t>All 3 spikes are within 3 months of a cap against a 14% chance rate. The caps and the CVE are one event: vendors moved against high counts in mid-2021 and the zones that would have failed were re-signed. Both sides capped it: PowerDNS Auth is a signer limiting what it will sign, Unbound a validator refusing what it reads. The RFC codified what the vendors had already forced. BIND's own default change (100 -&gt; 10) was 140 months earlier and moved nothing.</a:t>
             </a:r>
           </a:p>
         </p:txBody>
@@ -6254,7 +6254,7 @@
                 </a:solidFill>
                 <a:latin typeface="Segoe UI"/>
               </a:rPr>
-              <a:t>97 of the 441 CVEs are DNSSEC mechanisms; 69 of those sit in the RFC 4033/4034/4035 core (validation, RRSIG, DNSKEY, NSEC) and belong to no single later RFC. The per-RFC sets are small: NSEC3 12, trust anchors 8, ECDSA 2, EdDSA 1, RSA/SHA-256 and CDS none.</a:t>
+              <a:t>97 of the 441 CVEs are DNSSEC mechanisms; 69 of those sit in the RFC 4033/4034/4035 core (validation, RRSIG, DNSKEY, NSEC) and belong to no single later RFC. The per-RFC sets are small: NSEC3 12, trust anchors 8, ECDSA 2, EdDSA 1, RSA/SHA-256 and CDS none; DS digests (RFC 4509) 3 and RFC 2535 one, which the per-RFC slides do not cover.</a:t>
             </a:r>
           </a:p>
           <a:p>
@@ -6286,7 +6286,7 @@
                 </a:solidFill>
                 <a:latin typeface="Segoe UI"/>
               </a:rPr>
-              <a:t>Every CVE nearest to an adoption spike is a validator bug (memory leak, assertion failure). Median lag from a spike to the nearest CVE: 16 months for ECDSA, 57 for NSEC3. CVE-2022-38178 came 4 months before the second EdDSA episode; it is a BIND memory leak and not a reason to sign with EdDSA.</a:t>
+              <a:t>Most CVEs nearest to an adoption spike are resolver bugs (memory leak, assertion failure), but not all: CVE-2014-0591, nearest to 16 of the NSEC3 spikes, is an assertion failure in BIND's AUTHORITATIVE NSEC3 code. Median lag from a spike to the nearest CVE: 16.5 months for ECDSA, 57 for NSEC3. CVE-2022-38178 came 4 months before the second EdDSA episode; it is a BIND memory leak and not a reason to sign with EdDSA.</a:t>
             </a:r>
           </a:p>
           <a:p>
@@ -6302,7 +6302,7 @@
                 </a:solidFill>
                 <a:latin typeface="Segoe UI"/>
               </a:rPr>
-              <a:t>The one CVE inside a causal chain is CVE-2021-40083: a symptom of the iteration problem the 2021 caps fixed, published the month the caps shipped. The DNSSEC CVE surface is on validators (Unbound, BIND, Knot Resolver, PowerDNS Recursor); the signers whose defaults move zones publish almost none.</a:t>
+              <a:t>The one CVE inside a causal chain is CVE-2021-40083: a symptom of the iteration problem the 2021 caps fixed, published the month the caps shipped. The DNSSEC CVE surface sits on the resolvers: Unbound 16, PowerDNS Recursor 12, Knot Resolver 7. The pure signers publish almost none (Knot 4, PowerDNS Auth 3, OpenDNSSEC 0) -- but BIND, which both signs and validates, carries 31, more than any other product.</a:t>
             </a:r>
           </a:p>
           <a:p>
@@ -6742,7 +6742,7 @@
                             <a:srgbClr val="0B0B0B"/>
                           </a:solidFill>
                         </a:rPr>
-                        <a:t>slow</a:t>
+                        <a:t>already in use</a:t>
                       </a:r>
                     </a:p>
                   </a:txBody>
@@ -6763,7 +6763,7 @@
                             <a:srgbClr val="0B0B0B"/>
                           </a:solidFill>
                         </a:rPr>
-                        <a:t>signer option; BIND default from 9.7.0</a:t>
+                        <a:t>a signer option; no signer ever made it the default</a:t>
                       </a:r>
                     </a:p>
                   </a:txBody>
@@ -6784,7 +6784,7 @@
                             <a:srgbClr val="0B0B0B"/>
                           </a:solidFill>
                         </a:rPr>
-                        <a:t>first zone 2009-08; 10% at 2011-08</a:t>
+                        <a:t>already 11.6% of signed reverse delegations in 2009-07, the first month it is visible -- onset not measurable</a:t>
                       </a:r>
                     </a:p>
                   </a:txBody>
@@ -7042,7 +7042,7 @@
                             <a:srgbClr val="0B0B0B"/>
                           </a:solidFill>
                         </a:rPr>
-                        <a:t>0.37% reverse, 0.01% forward today</a:t>
+                        <a:t>0.41% reverse, 0.01% forward today (Ed25519 and Ed448 together)</a:t>
                       </a:r>
                     </a:p>
                   </a:txBody>
@@ -7128,7 +7128,7 @@
                             <a:srgbClr val="0B0B0B"/>
                           </a:solidFill>
                         </a:rPr>
-                        <a:t>0.00% in both corpora</a:t>
+                        <a:t>0.00% on the panel today; peaked at 5 delegations at RIPE in 2013-11</a:t>
                       </a:r>
                     </a:p>
                   </a:txBody>

--- a/out/analysis/dnssec_software_summary.pptx
+++ b/out/analysis/dnssec_software_summary.pptx
@@ -7344,7 +7344,23 @@
                 </a:solidFill>
                 <a:latin typeface="Segoe UI"/>
               </a:rPr>
-              <a:t>Take every month in which a DNSSEC CVE was patched (21 months; 39 CVEs, several sharing a fix month) and every month in which a DNSSEC RFC was published (16 months inside the reverse series). The adoption rate over that month and the three after it has the same distribution in both groups and in ordinary months: medians 4.0, 4.2 and 3.9 thousandths of a point per month; permutation p = 0.93.</a:t>
+              <a:t>Take every month in which a DNSSEC CVE was patched (21 months; 39 CVEs, several sharing a fix month) and every month in which a DNSSEC RFC was published (16 months inside the reverse series). The adoption rate over that month and the three after it has the same distribution in all three groups. Medians 4.0, 4.2 and 3.9 thousandths of a point per month, on 21, 16 and 140 months.</a:t>
+            </a:r>
+          </a:p>
+          <a:p>
+            <a:pPr>
+              <a:spcAft>
+                <a:spcPts val="600"/>
+              </a:spcAft>
+            </a:pPr>
+            <a:r>
+              <a:rPr sz="1100" b="0">
+                <a:solidFill>
+                  <a:srgbClr val="0B0B0B"/>
+                </a:solidFill>
+                <a:latin typeface="Segoe UI"/>
+              </a:rPr>
+              <a:t>The medians are a fragile summary at this sample size -- with 16 RFC months the median falls in a gap between the 8th and 9th values -- so the comparison is also run on ranks, which use every observation. Neither separates the groups: median permutation p = 0.93, rank permutation p = 0.72 for CVE against RFC, 0.47 and 0.87 for each against ordinary months.</a:t>
             </a:r>
           </a:p>
           <a:p>

--- a/out/analysis/dnssec_software_summary.pptx
+++ b/out/analysis/dnssec_software_summary.pptx
@@ -6302,7 +6302,7 @@
                 </a:solidFill>
                 <a:latin typeface="Segoe UI"/>
               </a:rPr>
-              <a:t>The one CVE inside a causal chain is CVE-2021-40083: a symptom of the iteration problem the 2021 caps fixed, published the month the caps shipped. The DNSSEC CVE surface sits on the resolvers: Unbound 16, PowerDNS Recursor 12, Knot Resolver 7. The pure signers publish almost none (Knot 4, PowerDNS Auth 3, OpenDNSSEC 0) -- but BIND, which both signs and validates, carries 31, more than any other product.</a:t>
+              <a:t>The one CVE inside a causal chain is CVE-2021-40083: a symptom of the iteration problem the 2021 caps fixed, published the month the caps shipped. The DNSSEC CVE surface sits on the resolvers: Unbound 16, PowerDNS Recursor 12, Knot Resolver 7. The pure signers publish almost none (Knot 4, PowerDNS Auth 3, OpenDNSSEC 0) -- but BIND, which both signs and validates, carries 40, more than any other product, of which 31 are matched by CPE and the rest by the fix landing in BIND's own repository. Knot and Knot Resolver have no usable CPE, so their counts are keyword-derived.</a:t>
             </a:r>
           </a:p>
           <a:p>

--- a/out/analysis/dnssec_software_summary.pptx
+++ b/out/analysis/dnssec_software_summary.pptx
@@ -3140,7 +3140,7 @@
                 </a:solidFill>
                 <a:latin typeface="Segoe UI"/>
               </a:rPr>
-              <a:t>8 PROGRAMS  ·  1,083 RELEASES  ·  441 CVEs  ·  OPENINTEL + REVERSE DNS</a:t>
+              <a:t>8 PROGRAMS  ·  1,083 RELEASES  ·  434 CVEs  ·  OPENINTEL + REVERSE DNS</a:t>
             </a:r>
           </a:p>
         </p:txBody>
@@ -4109,7 +4109,7 @@
                 </a:solidFill>
                 <a:latin typeface="Segoe UI"/>
               </a:rPr>
-              <a:t>441 CVEs across the eight products from NVD; 97 are DNSSEC mechanisms, classified by the mechanism the description names (NSEC3, validation, trust anchor, algorithm...). Five products are matched by NVD CPE; knot, kresd, opendnssec have no usable CPE and are keyword-matched, so a CVE is never attributed to them.</a:t>
+              <a:t>434 CVEs across the eight products from NVD; 97 are DNSSEC mechanisms, classified by the mechanism the description names (NSEC3, validation, trust anchor, algorithm...). Five products are matched by NVD CPE; knot, kresd, opendnssec have no usable CPE and are keyword-matched, so a CVE is never attributed to them.</a:t>
             </a:r>
           </a:p>
         </p:txBody>
@@ -6254,7 +6254,7 @@
                 </a:solidFill>
                 <a:latin typeface="Segoe UI"/>
               </a:rPr>
-              <a:t>97 of the 441 CVEs are DNSSEC mechanisms; 69 of those sit in the RFC 4033/4034/4035 core (validation, RRSIG, DNSKEY, NSEC) and belong to no single later RFC. The per-RFC sets are small: NSEC3 12, trust anchors 8, ECDSA 2, EdDSA 1, RSA/SHA-256 and CDS none; DS digests (RFC 4509) 3 and RFC 2535 one, which the per-RFC slides do not cover.</a:t>
+              <a:t>97 of the 434 CVEs are DNSSEC mechanisms; 69 of those sit in the RFC 4033/4034/4035 core (validation, RRSIG, DNSKEY, NSEC) and belong to no single later RFC. The per-RFC sets are small: NSEC3 12, trust anchors 8, ECDSA 2, EdDSA 1, RSA/SHA-256 and CDS none; DS digests (RFC 4509) 3 and RFC 2535 one, which the per-RFC slides do not cover.</a:t>
             </a:r>
           </a:p>
           <a:p>
@@ -6302,7 +6302,7 @@
                 </a:solidFill>
                 <a:latin typeface="Segoe UI"/>
               </a:rPr>
-              <a:t>The one CVE inside a causal chain is CVE-2021-40083: a symptom of the iteration problem the 2021 caps fixed, published the month the caps shipped. The DNSSEC CVE surface sits on the resolvers: Unbound 16, PowerDNS Recursor 12, Knot Resolver 7. The pure signers publish almost none (Knot 4, PowerDNS Auth 3, OpenDNSSEC 0) -- but BIND, which both signs and validates, carries 40, more than any other product, of which 31 are matched by CPE and the rest by the fix landing in BIND's own repository. Knot and Knot Resolver have no usable CPE, so their counts are keyword-derived.</a:t>
+              <a:t>The one CVE inside a causal chain is CVE-2021-40083: a symptom of the iteration problem the 2021 caps fixed, published the month the caps shipped. The DNSSEC CVE surface sits on the resolvers: Unbound 16, PowerDNS Recursor 12, Knot Resolver 7. The pure signers publish almost none (Knot 4, PowerDNS Auth 0, OpenDNSSEC 0) -- but BIND, which both signs and validates, carries 40, more than any other product, of which 31 are matched by CPE and the rest by the fix landing in BIND's own repository. Knot and Knot Resolver have no usable CPE, so their counts are keyword-derived.</a:t>
             </a:r>
           </a:p>
           <a:p>

--- a/out/analysis/dnssec_software_summary.pptx
+++ b/out/analysis/dnssec_software_summary.pptx
@@ -3436,7 +3436,7 @@
                 </a:solidFill>
                 <a:latin typeface="Segoe UI"/>
               </a:rPr>
-              <a:t>1.  Code is never the bottleneck. For the five RFCs whose onset is measurable, implementation came within -0.4 to +1.8 years of publication and the first zone took a further 0.1 to 3.8 years. The slowest code lag anywhere is RFC 5011 at +2.4 years, still well inside its adoption gap. The wait is operators, not vendors.</a:t>
+              <a:t>1.  Code is never the bottleneck. For the five RFCs whose onset is measurable, implementation came within -0.4 to +1.8 years of publication and the first zone took a further 0.2 to 3.9 years. The slowest code lag anywhere is RFC 5011 at +2.4 years, still well inside its adoption gap. The wait is operators, not vendors.</a:t>
             </a:r>
           </a:p>
           <a:p>
@@ -5482,7 +5482,7 @@
                 </a:solidFill>
                 <a:latin typeface="Segoe UI"/>
               </a:rPr>
-              <a:t>Across the algorithm and record-type RFCs the code lag runs -0.4 to +1.8 years (negative: a signer shipped it from the draft), while the lag from that release to the first zone runs 0.1 to 3.8 years. The RFC is never waiting for an implementation; it is waiting for an operator.</a:t>
+              <a:t>Across the algorithm and record-type RFCs the code lag runs -0.4 to +1.8 years (negative: a signer shipped it from the draft), while the lag from that release to the first zone runs 0.2 to 3.9 years. The RFC is never waiting for an implementation; it is waiting for an operator.</a:t>
             </a:r>
           </a:p>
           <a:p>
@@ -6286,7 +6286,7 @@
                 </a:solidFill>
                 <a:latin typeface="Segoe UI"/>
               </a:rPr>
-              <a:t>Most CVEs nearest to an adoption spike are resolver bugs (memory leak, assertion failure), but not all: CVE-2014-0591, nearest to 16 of the NSEC3 spikes, is an assertion failure in BIND's AUTHORITATIVE NSEC3 code. Median lag from a spike to the nearest CVE: 16.5 months for ECDSA, 57 for NSEC3. CVE-2022-38178 came 4 months before the second EdDSA episode; it is a BIND memory leak and not a reason to sign with EdDSA.</a:t>
+              <a:t>Most CVEs nearest to an adoption spike are resolver bugs (memory leak, assertion failure), but not all: CVE-2014-0591, nearest to 16 of the NSEC3 spikes, is an assertion failure in BIND's AUTHORITATIVE NSEC3 code. Median lag from a spike to the nearest CVE: 17.0 months for ECDSA, 58 for NSEC3. CVE-2022-38178 came 4 months before the second EdDSA episode; it is a BIND memory leak and not a reason to sign with EdDSA.</a:t>
             </a:r>
           </a:p>
           <a:p>
@@ -6612,7 +6612,7 @@
                             <a:srgbClr val="0B0B0B"/>
                           </a:solidFill>
                         </a:rPr>
-                        <a:t>first zone 2010-03; new signings 0% (2010Q4) -&gt; 20% (2011Q2) -&gt; 81% (2012Q2)</a:t>
+                        <a:t>first zone 2010-04; new signings 0% (2010Q4) -&gt; 20% (2011Q2) -&gt; 81% (2012Q2)</a:t>
                       </a:r>
                     </a:p>
                   </a:txBody>
@@ -6698,7 +6698,7 @@
                             <a:srgbClr val="0B0B0B"/>
                           </a:solidFill>
                         </a:rPr>
-                        <a:t>first zone 2015-11; majority only via 2019 rollovers and the 2021 .ch wave</a:t>
+                        <a:t>first zone 2015-12; majority only via 2019 rollovers and the 2021 .ch wave</a:t>
                       </a:r>
                     </a:p>
                   </a:txBody>
@@ -6784,7 +6784,7 @@
                             <a:srgbClr val="0B0B0B"/>
                           </a:solidFill>
                         </a:rPr>
-                        <a:t>already 11.6% of signed reverse delegations in 2009-07, the first month it is visible -- onset not measurable</a:t>
+                        <a:t>already 3.1% of signed reverse delegations in 2011-05, the first month it is visible -- onset not measurable</a:t>
                       </a:r>
                     </a:p>
                   </a:txBody>
@@ -7042,7 +7042,7 @@
                             <a:srgbClr val="0B0B0B"/>
                           </a:solidFill>
                         </a:rPr>
-                        <a:t>0.41% reverse, 0.01% forward today (Ed25519 and Ed448 together)</a:t>
+                        <a:t>0.37% reverse, 0.01% forward today (Ed25519 and Ed448 together)</a:t>
                       </a:r>
                     </a:p>
                   </a:txBody>
@@ -7128,7 +7128,7 @@
                             <a:srgbClr val="0B0B0B"/>
                           </a:solidFill>
                         </a:rPr>
-                        <a:t>0.00% on the panel today; peaked at 5 delegations at RIPE in 2013-11</a:t>
+                        <a:t>0.00% on the panel today; peaked at 5 delegations at RIPE in 2013-12</a:t>
                       </a:r>
                     </a:p>
                   </a:txBody>
